--- a/docs/presentacion_tfm.pptx
+++ b/docs/presentacion_tfm.pptx
@@ -3620,30 +3620,6 @@
           </a:p>
         </p:txBody>
       </p:sp>
-      <p:pic>
-        <p:nvPicPr>
-          <p:cNvPr id="3" name="Picture 2" descr="logo.png"/>
-          <p:cNvPicPr>
-            <a:picLocks noChangeAspect="1"/>
-          </p:cNvPicPr>
-          <p:nvPr/>
-        </p:nvPicPr>
-        <p:blipFill>
-          <a:blip r:embed="rId2"/>
-          <a:stretch>
-            <a:fillRect/>
-          </a:stretch>
-        </p:blipFill>
-        <p:spPr>
-          <a:xfrm>
-            <a:off x="4261104" y="914400"/>
-            <a:ext cx="3657600" cy="1005070"/>
-          </a:xfrm>
-          <a:prstGeom prst="rect">
-            <a:avLst/>
-          </a:prstGeom>
-        </p:spPr>
-      </p:pic>
       <p:sp>
         <p:nvSpPr>
           <p:cNvPr id="4" name="TextBox 3"/>
@@ -3652,8 +3628,8 @@
         </p:nvSpPr>
         <p:spPr>
           <a:xfrm>
-            <a:off x="914400" y="2880360"/>
-            <a:ext cx="10332720" cy="1188720"/>
+            <a:off x="3678468" y="2880360"/>
+            <a:ext cx="4804584" cy="707886"/>
           </a:xfrm>
           <a:prstGeom prst="rect">
             <a:avLst/>
@@ -3674,8 +3650,10 @@
               </a:defRPr>
             </a:pPr>
             <a:r>
-              <a:t>Restaurant Intelligence</a:t>
-            </a:r>
+              <a:rPr lang="es-ES" dirty="0"/>
+              <a:t>Trabajo Fin de Máster</a:t>
+            </a:r>
+            <a:endParaRPr dirty="0"/>
           </a:p>
         </p:txBody>
       </p:sp>
@@ -3734,8 +3712,8 @@
         </p:nvSpPr>
         <p:spPr>
           <a:xfrm>
-            <a:off x="1371600" y="5943600"/>
-            <a:ext cx="9418320" cy="548640"/>
+            <a:off x="2734311" y="5943600"/>
+            <a:ext cx="6692921" cy="307777"/>
           </a:xfrm>
           <a:prstGeom prst="rect">
             <a:avLst/>
@@ -3756,7 +3734,12 @@
               </a:defRPr>
             </a:pPr>
             <a:r>
-              <a:t>Ana Ruiz Martínez  ·  Trabajo Fin de Máster</a:t>
+              <a:rPr lang="es-ES" dirty="0"/>
+              <a:t>Laura Simón Revuelta, Joaquín Delgado Amar, Cándida Oviedo Martí, </a:t>
+            </a:r>
+            <a:r>
+              <a:rPr dirty="0"/>
+              <a:t>Ana Ruiz Martínez</a:t>
             </a:r>
           </a:p>
         </p:txBody>
@@ -6526,6 +6509,36 @@
           </a:p>
         </p:txBody>
       </p:sp>
+      <p:pic>
+        <p:nvPicPr>
+          <p:cNvPr id="9" name="Picture 2" descr="logo.png">
+            <a:extLst>
+              <a:ext uri="{FF2B5EF4-FFF2-40B4-BE49-F238E27FC236}">
+                <a16:creationId xmlns:a16="http://schemas.microsoft.com/office/drawing/2014/main" id="{B747E1D7-01CC-94A3-BF8D-83811F875A4B}"/>
+              </a:ext>
+            </a:extLst>
+          </p:cNvPr>
+          <p:cNvPicPr>
+            <a:picLocks noChangeAspect="1"/>
+          </p:cNvPicPr>
+          <p:nvPr/>
+        </p:nvPicPr>
+        <p:blipFill>
+          <a:blip r:embed="rId2"/>
+          <a:stretch>
+            <a:fillRect/>
+          </a:stretch>
+        </p:blipFill>
+        <p:spPr>
+          <a:xfrm>
+            <a:off x="1325399" y="4700337"/>
+            <a:ext cx="3657600" cy="1005070"/>
+          </a:xfrm>
+          <a:prstGeom prst="rect">
+            <a:avLst/>
+          </a:prstGeom>
+        </p:spPr>
+      </p:pic>
     </p:spTree>
   </p:cSld>
   <p:clrMapOvr>
